--- a/docs/procurement_logistics_ai_5M.pptx
+++ b/docs/procurement_logistics_ai_5M.pptx
@@ -15,7 +15,8 @@
     <p:sldId id="279" r:id="rId9"/>
     <p:sldId id="270" r:id="rId10"/>
     <p:sldId id="271" r:id="rId11"/>
-    <p:sldId id="278" r:id="rId12"/>
+    <p:sldId id="280" r:id="rId12"/>
+    <p:sldId id="278" r:id="rId13"/>
   </p:sldIdLst>
   <p:sldSz cx="12192000" cy="6858000"/>
   <p:notesSz cx="6858000" cy="9144000"/>
@@ -139,7 +140,7 @@
     <p1510:client id="{41194A14-DEA4-43D1-6AE0-680207CD8132}" v="2309" dt="2026-05-18T14:59:02.734"/>
     <p1510:client id="{604FCC6F-3D47-A295-75EC-19558837CE6F}" v="627" dt="2026-05-19T00:46:59.422"/>
     <p1510:client id="{94674C48-0ABA-B26F-4039-04AD4DEAADC3}" v="44" dt="2026-05-19T01:08:34.711"/>
-    <p1510:client id="{D574EE88-DC9B-8A1C-4C79-4DE3DDB4AC0E}" v="352" dt="2026-05-19T04:01:29.426"/>
+    <p1510:client id="{D574EE88-DC9B-8A1C-4C79-4DE3DDB4AC0E}" v="1305" dt="2026-05-19T06:39:22.507"/>
   </p1510:revLst>
 </p1510:revInfo>
 </file>
@@ -4946,6 +4947,1055 @@
 </file>
 
 <file path=ppt/slides/slide11.xml><?xml version="1.0" encoding="utf-8"?>
+<p:sld xmlns:a="http://schemas.openxmlformats.org/drawingml/2006/main" xmlns:r="http://schemas.openxmlformats.org/officeDocument/2006/relationships" xmlns:p="http://schemas.openxmlformats.org/presentationml/2006/main">
+  <p:cSld>
+    <p:bg>
+      <p:bgPr>
+        <a:solidFill>
+          <a:srgbClr val="FFFFFF"/>
+        </a:solidFill>
+        <a:effectLst/>
+      </p:bgPr>
+    </p:bg>
+    <p:spTree>
+      <p:nvGrpSpPr>
+        <p:cNvPr id="1" name="">
+          <a:extLst>
+            <a:ext uri="{FF2B5EF4-FFF2-40B4-BE49-F238E27FC236}">
+              <a16:creationId xmlns:a16="http://schemas.microsoft.com/office/drawing/2014/main" id="{4C30A576-B446-C8E0-3153-9454BEC7AC62}"/>
+            </a:ext>
+          </a:extLst>
+        </p:cNvPr>
+        <p:cNvGrpSpPr/>
+        <p:nvPr/>
+      </p:nvGrpSpPr>
+      <p:grpSpPr>
+        <a:xfrm>
+          <a:off x="0" y="0"/>
+          <a:ext cx="0" cy="0"/>
+          <a:chOff x="0" y="0"/>
+          <a:chExt cx="0" cy="0"/>
+        </a:xfrm>
+      </p:grpSpPr>
+      <p:sp>
+        <p:nvSpPr>
+          <p:cNvPr id="2" name="TextBox 1">
+            <a:extLst>
+              <a:ext uri="{FF2B5EF4-FFF2-40B4-BE49-F238E27FC236}">
+                <a16:creationId xmlns:a16="http://schemas.microsoft.com/office/drawing/2014/main" id="{309AA654-8156-D110-CAA4-540B2A2492E1}"/>
+              </a:ext>
+            </a:extLst>
+          </p:cNvPr>
+          <p:cNvSpPr txBox="1"/>
+          <p:nvPr/>
+        </p:nvSpPr>
+        <p:spPr>
+          <a:xfrm>
+            <a:off x="502920" y="256032"/>
+            <a:ext cx="9692640" cy="424732"/>
+          </a:xfrm>
+          <a:prstGeom prst="rect">
+            <a:avLst/>
+          </a:prstGeom>
+          <a:noFill/>
+        </p:spPr>
+        <p:txBody>
+          <a:bodyPr wrap="square" lIns="45720" tIns="27432" rIns="45720" bIns="27432" anchor="t">
+            <a:spAutoFit/>
+          </a:bodyPr>
+          <a:lstStyle/>
+          <a:p>
+            <a:r>
+              <a:rPr lang="ko-KR" sz="2400" b="1">
+                <a:solidFill>
+                  <a:srgbClr val="0F2340"/>
+                </a:solidFill>
+                <a:latin typeface="Malgun Gothic"/>
+                <a:ea typeface="Malgun Gothic"/>
+                <a:cs typeface="+mn-lt"/>
+              </a:rPr>
+              <a:t>활용</a:t>
+            </a:r>
+            <a:r>
+              <a:rPr lang="en-US" sz="2400" b="1" dirty="0">
+                <a:solidFill>
+                  <a:srgbClr val="0F2340"/>
+                </a:solidFill>
+                <a:latin typeface="Malgun Gothic"/>
+                <a:ea typeface="Malgun Gothic"/>
+                <a:cs typeface="+mn-lt"/>
+              </a:rPr>
+              <a:t> </a:t>
+            </a:r>
+            <a:r>
+              <a:rPr lang="ko-KR" sz="2400" b="1" err="1">
+                <a:solidFill>
+                  <a:srgbClr val="0F2340"/>
+                </a:solidFill>
+                <a:latin typeface="Malgun Gothic"/>
+                <a:ea typeface="Malgun Gothic"/>
+                <a:cs typeface="+mn-lt"/>
+              </a:rPr>
+              <a:t>공공데이터</a:t>
+            </a:r>
+            <a:r>
+              <a:rPr lang="en-US" sz="2400" b="1" dirty="0">
+                <a:solidFill>
+                  <a:srgbClr val="0F2340"/>
+                </a:solidFill>
+                <a:latin typeface="Malgun Gothic"/>
+                <a:ea typeface="Malgun Gothic"/>
+                <a:cs typeface="+mn-lt"/>
+              </a:rPr>
+              <a:t> </a:t>
+            </a:r>
+            <a:r>
+              <a:rPr lang="ko-KR" sz="2400" b="1" err="1">
+                <a:solidFill>
+                  <a:srgbClr val="0F2340"/>
+                </a:solidFill>
+                <a:latin typeface="Malgun Gothic"/>
+                <a:ea typeface="Malgun Gothic"/>
+                <a:cs typeface="+mn-lt"/>
+              </a:rPr>
+              <a:t>목록</a:t>
+            </a:r>
+            <a:endParaRPr sz="2400" b="1" err="1">
+              <a:solidFill>
+                <a:srgbClr val="0F2340"/>
+              </a:solidFill>
+              <a:latin typeface="Malgun Gothic"/>
+              <a:ea typeface="Malgun Gothic"/>
+            </a:endParaRPr>
+          </a:p>
+        </p:txBody>
+      </p:sp>
+      <p:sp>
+        <p:nvSpPr>
+          <p:cNvPr id="4" name="TextBox 3">
+            <a:extLst>
+              <a:ext uri="{FF2B5EF4-FFF2-40B4-BE49-F238E27FC236}">
+                <a16:creationId xmlns:a16="http://schemas.microsoft.com/office/drawing/2014/main" id="{9CF0E65A-8445-B08A-C7DE-2B4725B79888}"/>
+              </a:ext>
+            </a:extLst>
+          </p:cNvPr>
+          <p:cNvSpPr txBox="1"/>
+          <p:nvPr/>
+        </p:nvSpPr>
+        <p:spPr>
+          <a:xfrm>
+            <a:off x="11201400" y="320040"/>
+            <a:ext cx="548640" cy="240066"/>
+          </a:xfrm>
+          <a:prstGeom prst="rect">
+            <a:avLst/>
+          </a:prstGeom>
+          <a:noFill/>
+        </p:spPr>
+        <p:txBody>
+          <a:bodyPr wrap="square" lIns="45720" tIns="27432" rIns="45720" bIns="27432" anchor="t">
+            <a:spAutoFit/>
+          </a:bodyPr>
+          <a:lstStyle/>
+          <a:p>
+            <a:pPr algn="r"/>
+            <a:r>
+              <a:rPr lang="en-US" sz="1200" b="1">
+                <a:solidFill>
+                  <a:srgbClr val="2563EB"/>
+                </a:solidFill>
+                <a:latin typeface="Malgun Gothic"/>
+              </a:rPr>
+              <a:t>08</a:t>
+            </a:r>
+            <a:endParaRPr sz="1200" b="1">
+              <a:solidFill>
+                <a:srgbClr val="2563EB"/>
+              </a:solidFill>
+              <a:latin typeface="Malgun Gothic"/>
+            </a:endParaRPr>
+          </a:p>
+        </p:txBody>
+      </p:sp>
+      <p:sp>
+        <p:nvSpPr>
+          <p:cNvPr id="5" name="Rectangle 4">
+            <a:extLst>
+              <a:ext uri="{FF2B5EF4-FFF2-40B4-BE49-F238E27FC236}">
+                <a16:creationId xmlns:a16="http://schemas.microsoft.com/office/drawing/2014/main" id="{841A9881-0019-39CC-40E0-8F21504144B6}"/>
+              </a:ext>
+            </a:extLst>
+          </p:cNvPr>
+          <p:cNvSpPr/>
+          <p:nvPr/>
+        </p:nvSpPr>
+        <p:spPr>
+          <a:xfrm>
+            <a:off x="493527" y="5955524"/>
+            <a:ext cx="11201400" cy="22860"/>
+          </a:xfrm>
+          <a:prstGeom prst="rect">
+            <a:avLst/>
+          </a:prstGeom>
+          <a:solidFill>
+            <a:srgbClr val="DBEAFE"/>
+          </a:solidFill>
+          <a:ln>
+            <a:solidFill>
+              <a:srgbClr val="DBEAFE"/>
+            </a:solidFill>
+          </a:ln>
+        </p:spPr>
+        <p:style>
+          <a:lnRef idx="1">
+            <a:schemeClr val="accent1"/>
+          </a:lnRef>
+          <a:fillRef idx="3">
+            <a:schemeClr val="accent1"/>
+          </a:fillRef>
+          <a:effectRef idx="2">
+            <a:schemeClr val="accent1"/>
+          </a:effectRef>
+          <a:fontRef idx="minor">
+            <a:schemeClr val="lt1"/>
+          </a:fontRef>
+        </p:style>
+        <p:txBody>
+          <a:bodyPr rtlCol="0" anchor="ctr"/>
+          <a:lstStyle/>
+          <a:p>
+            <a:pPr algn="ctr"/>
+            <a:endParaRPr/>
+          </a:p>
+        </p:txBody>
+      </p:sp>
+      <p:graphicFrame>
+        <p:nvGraphicFramePr>
+          <p:cNvPr id="37" name="표 36">
+            <a:extLst>
+              <a:ext uri="{FF2B5EF4-FFF2-40B4-BE49-F238E27FC236}">
+                <a16:creationId xmlns:a16="http://schemas.microsoft.com/office/drawing/2014/main" id="{61660E28-F7FA-4C95-B423-0DB50F364E6A}"/>
+              </a:ext>
+            </a:extLst>
+          </p:cNvPr>
+          <p:cNvGraphicFramePr>
+            <a:graphicFrameLocks noGrp="1"/>
+          </p:cNvGraphicFramePr>
+          <p:nvPr>
+            <p:extLst>
+              <p:ext uri="{D42A27DB-BD31-4B8C-83A1-F6EECF244321}">
+                <p14:modId xmlns:p14="http://schemas.microsoft.com/office/powerpoint/2010/main" val="701819796"/>
+              </p:ext>
+            </p:extLst>
+          </p:nvPr>
+        </p:nvGraphicFramePr>
+        <p:xfrm>
+          <a:off x="482504" y="968651"/>
+          <a:ext cx="11221953" cy="4880735"/>
+        </p:xfrm>
+        <a:graphic>
+          <a:graphicData uri="http://schemas.openxmlformats.org/drawingml/2006/table">
+            <a:tbl>
+              <a:tblPr firstRow="1" bandRow="1">
+                <a:tableStyleId>{5C22544A-7EE6-4342-B048-85BDC9FD1C3A}</a:tableStyleId>
+              </a:tblPr>
+              <a:tblGrid>
+                <a:gridCol w="1635512">
+                  <a:extLst>
+                    <a:ext uri="{9D8B030D-6E8A-4147-A177-3AD203B41FA5}">
+                      <a16:colId xmlns:a16="http://schemas.microsoft.com/office/drawing/2014/main" val="4200310474"/>
+                    </a:ext>
+                  </a:extLst>
+                </a:gridCol>
+                <a:gridCol w="1877121">
+                  <a:extLst>
+                    <a:ext uri="{9D8B030D-6E8A-4147-A177-3AD203B41FA5}">
+                      <a16:colId xmlns:a16="http://schemas.microsoft.com/office/drawing/2014/main" val="1043703782"/>
+                    </a:ext>
+                  </a:extLst>
+                </a:gridCol>
+                <a:gridCol w="4869366">
+                  <a:extLst>
+                    <a:ext uri="{9D8B030D-6E8A-4147-A177-3AD203B41FA5}">
+                      <a16:colId xmlns:a16="http://schemas.microsoft.com/office/drawing/2014/main" val="2461640162"/>
+                    </a:ext>
+                  </a:extLst>
+                </a:gridCol>
+                <a:gridCol w="2839954">
+                  <a:extLst>
+                    <a:ext uri="{9D8B030D-6E8A-4147-A177-3AD203B41FA5}">
+                      <a16:colId xmlns:a16="http://schemas.microsoft.com/office/drawing/2014/main" val="3101195848"/>
+                    </a:ext>
+                  </a:extLst>
+                </a:gridCol>
+              </a:tblGrid>
+              <a:tr h="599011">
+                <a:tc>
+                  <a:txBody>
+                    <a:bodyPr/>
+                    <a:lstStyle/>
+                    <a:p>
+                      <a:pPr algn="ctr" latinLnBrk="1"/>
+                      <a:r>
+                        <a:rPr lang="ko-KR" altLang="en-US" sz="2400"/>
+                        <a:t>기관</a:t>
+                      </a:r>
+                    </a:p>
+                  </a:txBody>
+                  <a:tcPr anchor="ctr"/>
+                </a:tc>
+                <a:tc>
+                  <a:txBody>
+                    <a:bodyPr/>
+                    <a:lstStyle/>
+                    <a:p>
+                      <a:pPr algn="ctr" latinLnBrk="1"/>
+                      <a:r>
+                        <a:rPr lang="ko-KR" altLang="en-US" sz="2400"/>
+                        <a:t>데이터/API</a:t>
+                      </a:r>
+                    </a:p>
+                  </a:txBody>
+                  <a:tcPr anchor="ctr"/>
+                </a:tc>
+                <a:tc>
+                  <a:txBody>
+                    <a:bodyPr/>
+                    <a:lstStyle/>
+                    <a:p>
+                      <a:pPr algn="ctr" latinLnBrk="1"/>
+                      <a:r>
+                        <a:rPr lang="ko-KR" altLang="en-US" sz="2400"/>
+                        <a:t>URL</a:t>
+                      </a:r>
+                    </a:p>
+                  </a:txBody>
+                  <a:tcPr anchor="ctr"/>
+                </a:tc>
+                <a:tc>
+                  <a:txBody>
+                    <a:bodyPr/>
+                    <a:lstStyle/>
+                    <a:p>
+                      <a:pPr algn="ctr" latinLnBrk="1"/>
+                      <a:r>
+                        <a:rPr lang="ko-KR" altLang="en-US" sz="2400"/>
+                        <a:t>활용 내용</a:t>
+                      </a:r>
+                    </a:p>
+                  </a:txBody>
+                  <a:tcPr anchor="ctr"/>
+                </a:tc>
+                <a:extLst>
+                  <a:ext uri="{0D108BD9-81ED-4DB2-BD59-A6C34878D82A}">
+                    <a16:rowId xmlns:a16="http://schemas.microsoft.com/office/drawing/2014/main" val="4104018602"/>
+                  </a:ext>
+                </a:extLst>
+              </a:tr>
+              <a:tr h="599011">
+                <a:tc rowSpan="2">
+                  <a:txBody>
+                    <a:bodyPr/>
+                    <a:lstStyle/>
+                    <a:p>
+                      <a:pPr algn="ctr" latinLnBrk="1"/>
+                      <a:r>
+                        <a:rPr lang="ko-KR" altLang="en-US" sz="1600"/>
+                        <a:t>조달청</a:t>
+                      </a:r>
+                      <a:endParaRPr lang="ko-KR" altLang="en-US" sz="1600" dirty="0"/>
+                    </a:p>
+                  </a:txBody>
+                  <a:tcPr anchor="ctr"/>
+                </a:tc>
+                <a:tc>
+                  <a:txBody>
+                    <a:bodyPr/>
+                    <a:lstStyle/>
+                    <a:p>
+                      <a:pPr latinLnBrk="1"/>
+                      <a:r>
+                        <a:rPr lang="ko-KR" altLang="en-US" sz="1600"/>
+                        <a:t>나라장터 입찰공고정보 API</a:t>
+                      </a:r>
+                      <a:endParaRPr lang="ko-KR" altLang="en-US" sz="1600" dirty="0"/>
+                    </a:p>
+                  </a:txBody>
+                  <a:tcPr anchor="ctr"/>
+                </a:tc>
+                <a:tc rowSpan="2">
+                  <a:txBody>
+                    <a:bodyPr/>
+                    <a:lstStyle/>
+                    <a:p>
+                      <a:pPr lvl="0">
+                        <a:buNone/>
+                      </a:pPr>
+                      <a:r>
+                        <a:rPr lang="ko-KR" sz="1600" b="0" i="0" u="none" strike="noStrike" baseline="0" noProof="0">
+                          <a:solidFill>
+                            <a:srgbClr val="000000"/>
+                          </a:solidFill>
+                          <a:latin typeface="맑은 고딕"/>
+                          <a:ea typeface="맑은 고딕"/>
+                        </a:rPr>
+                        <a:t>apis.data.go.kr/1230000/ad/BidPublicInfoService</a:t>
+                      </a:r>
+                    </a:p>
+                  </a:txBody>
+                  <a:tcPr anchor="ctr"/>
+                </a:tc>
+                <a:tc>
+                  <a:txBody>
+                    <a:bodyPr/>
+                    <a:lstStyle/>
+                    <a:p>
+                      <a:pPr lvl="0">
+                        <a:buNone/>
+                      </a:pPr>
+                      <a:r>
+                        <a:rPr lang="ko-KR" sz="1600" b="0" i="0" u="none" strike="noStrike" baseline="0" noProof="0">
+                          <a:solidFill>
+                            <a:srgbClr val="000000"/>
+                          </a:solidFill>
+                          <a:latin typeface="맑은 고딕"/>
+                          <a:ea typeface="맑은 고딕"/>
+                        </a:rPr>
+                        <a:t>지역·품목별 공고 수, 발주금액, 공공수요 산출</a:t>
+                      </a:r>
+                      <a:endParaRPr lang="ko-KR" sz="1600"/>
+                    </a:p>
+                  </a:txBody>
+                  <a:tcPr anchor="ctr"/>
+                </a:tc>
+                <a:extLst>
+                  <a:ext uri="{0D108BD9-81ED-4DB2-BD59-A6C34878D82A}">
+                    <a16:rowId xmlns:a16="http://schemas.microsoft.com/office/drawing/2014/main" val="2751360650"/>
+                  </a:ext>
+                </a:extLst>
+              </a:tr>
+              <a:tr h="599011">
+                <a:tc vMerge="1">
+                  <a:txBody>
+                    <a:bodyPr/>
+                    <a:lstStyle/>
+                    <a:p>
+                      <a:endParaRPr lang="ko-KR"/>
+                    </a:p>
+                  </a:txBody>
+                  <a:tcPr anchor="ctr"/>
+                </a:tc>
+                <a:tc>
+                  <a:txBody>
+                    <a:bodyPr/>
+                    <a:lstStyle/>
+                    <a:p>
+                      <a:pPr latinLnBrk="1"/>
+                      <a:r>
+                        <a:rPr lang="ko-KR" altLang="en-US" sz="1600"/>
+                        <a:t>낙찰결과 API</a:t>
+                      </a:r>
+                      <a:endParaRPr lang="ko-KR" altLang="en-US" sz="1600" dirty="0"/>
+                    </a:p>
+                  </a:txBody>
+                  <a:tcPr anchor="ctr"/>
+                </a:tc>
+                <a:tc vMerge="1">
+                  <a:txBody>
+                    <a:bodyPr/>
+                    <a:lstStyle/>
+                    <a:p>
+                      <a:endParaRPr lang="ko-KR"/>
+                    </a:p>
+                  </a:txBody>
+                  <a:tcPr anchor="ctr"/>
+                </a:tc>
+                <a:tc>
+                  <a:txBody>
+                    <a:bodyPr/>
+                    <a:lstStyle/>
+                    <a:p>
+                      <a:pPr lvl="0">
+                        <a:buNone/>
+                      </a:pPr>
+                      <a:r>
+                        <a:rPr lang="ko-KR" sz="1600" b="0" i="0" u="none" strike="noStrike" baseline="0" noProof="0">
+                          <a:solidFill>
+                            <a:srgbClr val="000000"/>
+                          </a:solidFill>
+                          <a:latin typeface="맑은 고딕"/>
+                          <a:ea typeface="맑은 고딕"/>
+                        </a:rPr>
+                        <a:t>향후 계약 성사율 보정용 고도화 데이터</a:t>
+                      </a:r>
+                      <a:endParaRPr lang="ko-KR" sz="1600"/>
+                    </a:p>
+                  </a:txBody>
+                  <a:tcPr anchor="ctr"/>
+                </a:tc>
+                <a:extLst>
+                  <a:ext uri="{0D108BD9-81ED-4DB2-BD59-A6C34878D82A}">
+                    <a16:rowId xmlns:a16="http://schemas.microsoft.com/office/drawing/2014/main" val="33146294"/>
+                  </a:ext>
+                </a:extLst>
+              </a:tr>
+              <a:tr h="687658">
+                <a:tc rowSpan="3">
+                  <a:txBody>
+                    <a:bodyPr/>
+                    <a:lstStyle/>
+                    <a:p>
+                      <a:pPr algn="ctr" latinLnBrk="1"/>
+                      <a:endParaRPr lang="ko-KR" altLang="en-US" sz="1600" dirty="0"/>
+                    </a:p>
+                    <a:p>
+                      <a:pPr lvl="0" algn="ctr">
+                        <a:buNone/>
+                      </a:pPr>
+                      <a:r>
+                        <a:rPr lang="ko-KR" altLang="en-US" sz="1600"/>
+                        <a:t>행정안전부</a:t>
+                      </a:r>
+                      <a:endParaRPr lang="ko-KR" altLang="en-US" sz="1600" dirty="0"/>
+                    </a:p>
+                    <a:p>
+                      <a:pPr lvl="0" algn="ctr">
+                        <a:buNone/>
+                      </a:pPr>
+                      <a:endParaRPr lang="ko-KR" altLang="en-US" sz="1600" dirty="0"/>
+                    </a:p>
+                  </a:txBody>
+                  <a:tcPr anchor="ctr"/>
+                </a:tc>
+                <a:tc>
+                  <a:txBody>
+                    <a:bodyPr/>
+                    <a:lstStyle/>
+                    <a:p>
+                      <a:pPr latinLnBrk="1"/>
+                      <a:r>
+                        <a:rPr lang="ko-KR" altLang="en-US" sz="1600"/>
+                        <a:t>주민등록 인구통계</a:t>
+                      </a:r>
+                      <a:endParaRPr lang="ko-KR" altLang="en-US" sz="1600" dirty="0"/>
+                    </a:p>
+                  </a:txBody>
+                  <a:tcPr anchor="ctr"/>
+                </a:tc>
+                <a:tc>
+                  <a:txBody>
+                    <a:bodyPr/>
+                    <a:lstStyle/>
+                    <a:p>
+                      <a:pPr lvl="0">
+                        <a:buNone/>
+                      </a:pPr>
+                      <a:r>
+                        <a:rPr lang="ko-KR" sz="1600" b="0" i="0" u="none" strike="noStrike" baseline="0" noProof="0">
+                          <a:solidFill>
+                            <a:srgbClr val="000000"/>
+                          </a:solidFill>
+                          <a:latin typeface="맑은 고딕"/>
+                          <a:ea typeface="맑은 고딕"/>
+                        </a:rPr>
+                        <a:t>apis.data.go.kr/1741000/stdgPpltnHhStus</a:t>
+                      </a:r>
+                      <a:endParaRPr lang="ko-KR" sz="1600"/>
+                    </a:p>
+                  </a:txBody>
+                  <a:tcPr anchor="ctr"/>
+                </a:tc>
+                <a:tc>
+                  <a:txBody>
+                    <a:bodyPr/>
+                    <a:lstStyle/>
+                    <a:p>
+                      <a:pPr lvl="0">
+                        <a:buNone/>
+                      </a:pPr>
+                      <a:r>
+                        <a:rPr lang="ko-KR" sz="1600" b="0" i="0" u="none" strike="noStrike" baseline="0" noProof="0">
+                          <a:solidFill>
+                            <a:srgbClr val="000000"/>
+                          </a:solidFill>
+                          <a:latin typeface="맑은 고딕"/>
+                          <a:ea typeface="맑은 고딕"/>
+                        </a:rPr>
+                        <a:t>지역 인구 규모 반영</a:t>
+                      </a:r>
+                      <a:endParaRPr lang="ko-KR" sz="1600"/>
+                    </a:p>
+                  </a:txBody>
+                  <a:tcPr anchor="ctr"/>
+                </a:tc>
+                <a:extLst>
+                  <a:ext uri="{0D108BD9-81ED-4DB2-BD59-A6C34878D82A}">
+                    <a16:rowId xmlns:a16="http://schemas.microsoft.com/office/drawing/2014/main" val="2978745742"/>
+                  </a:ext>
+                </a:extLst>
+              </a:tr>
+              <a:tr h="599011">
+                <a:tc vMerge="1">
+                  <a:txBody>
+                    <a:bodyPr/>
+                    <a:lstStyle/>
+                    <a:p>
+                      <a:endParaRPr lang="ko-KR" altLang="en-US" sz="1800"/>
+                    </a:p>
+                  </a:txBody>
+                  <a:tcPr anchor="ctr"/>
+                </a:tc>
+                <a:tc>
+                  <a:txBody>
+                    <a:bodyPr/>
+                    <a:lstStyle/>
+                    <a:p>
+                      <a:pPr latinLnBrk="1"/>
+                      <a:r>
+                        <a:rPr lang="ko-KR" altLang="en-US" sz="1600"/>
+                        <a:t>연령별 인구현황</a:t>
+                      </a:r>
+                      <a:endParaRPr lang="ko-KR" altLang="en-US" sz="1600" dirty="0"/>
+                    </a:p>
+                  </a:txBody>
+                  <a:tcPr anchor="ctr"/>
+                </a:tc>
+                <a:tc rowSpan="2">
+                  <a:txBody>
+                    <a:bodyPr/>
+                    <a:lstStyle/>
+                    <a:p>
+                      <a:pPr lvl="0">
+                        <a:buNone/>
+                      </a:pPr>
+                      <a:r>
+                        <a:rPr lang="ko-KR" sz="1600" b="0" i="0" u="none" strike="noStrike" baseline="0" noProof="0">
+                          <a:solidFill>
+                            <a:srgbClr val="000000"/>
+                          </a:solidFill>
+                          <a:latin typeface="맑은 고딕"/>
+                          <a:ea typeface="맑은 고딕"/>
+                        </a:rPr>
+                        <a:t>apis.data.go.kr/1741000/admmSexdAgePpltn</a:t>
+                      </a:r>
+                    </a:p>
+                  </a:txBody>
+                  <a:tcPr anchor="ctr"/>
+                </a:tc>
+                <a:tc>
+                  <a:txBody>
+                    <a:bodyPr/>
+                    <a:lstStyle/>
+                    <a:p>
+                      <a:pPr lvl="0">
+                        <a:buNone/>
+                      </a:pPr>
+                      <a:r>
+                        <a:rPr lang="ko-KR" sz="1600" b="0" i="0" u="none" strike="noStrike" baseline="0" noProof="0">
+                          <a:solidFill>
+                            <a:srgbClr val="000000"/>
+                          </a:solidFill>
+                          <a:latin typeface="맑은 고딕"/>
+                          <a:ea typeface="맑은 고딕"/>
+                        </a:rPr>
+                        <a:t>소비층 구조 분석</a:t>
+                      </a:r>
+                      <a:endParaRPr lang="ko-KR" sz="1600"/>
+                    </a:p>
+                  </a:txBody>
+                  <a:tcPr anchor="ctr"/>
+                </a:tc>
+                <a:extLst>
+                  <a:ext uri="{0D108BD9-81ED-4DB2-BD59-A6C34878D82A}">
+                    <a16:rowId xmlns:a16="http://schemas.microsoft.com/office/drawing/2014/main" val="3842196779"/>
+                  </a:ext>
+                </a:extLst>
+              </a:tr>
+              <a:tr h="599011">
+                <a:tc vMerge="1">
+                  <a:txBody>
+                    <a:bodyPr/>
+                    <a:lstStyle/>
+                    <a:p>
+                      <a:endParaRPr lang="ko-KR" altLang="en-US" sz="1800"/>
+                    </a:p>
+                  </a:txBody>
+                  <a:tcPr anchor="ctr"/>
+                </a:tc>
+                <a:tc>
+                  <a:txBody>
+                    <a:bodyPr/>
+                    <a:lstStyle/>
+                    <a:p>
+                      <a:pPr latinLnBrk="1"/>
+                      <a:r>
+                        <a:rPr lang="ko-KR" altLang="en-US" sz="1600"/>
+                        <a:t>성별·연령별 인구</a:t>
+                      </a:r>
+                      <a:endParaRPr lang="ko-KR" altLang="en-US" sz="1600" dirty="0"/>
+                    </a:p>
+                  </a:txBody>
+                  <a:tcPr anchor="ctr"/>
+                </a:tc>
+                <a:tc vMerge="1">
+                  <a:txBody>
+                    <a:bodyPr/>
+                    <a:lstStyle/>
+                    <a:p>
+                      <a:endParaRPr lang="ko-KR"/>
+                    </a:p>
+                  </a:txBody>
+                  <a:tcPr anchor="ctr"/>
+                </a:tc>
+                <a:tc>
+                  <a:txBody>
+                    <a:bodyPr/>
+                    <a:lstStyle/>
+                    <a:p>
+                      <a:pPr lvl="0">
+                        <a:buNone/>
+                      </a:pPr>
+                      <a:r>
+                        <a:rPr lang="ko-KR" sz="1600" b="0" i="0" u="none" strike="noStrike" baseline="0" noProof="0">
+                          <a:solidFill>
+                            <a:srgbClr val="000000"/>
+                          </a:solidFill>
+                          <a:latin typeface="맑은 고딕"/>
+                          <a:ea typeface="맑은 고딕"/>
+                        </a:rPr>
+                        <a:t>품목별 소비층 적합도 산출</a:t>
+                      </a:r>
+                      <a:endParaRPr lang="ko-KR" sz="1600"/>
+                    </a:p>
+                  </a:txBody>
+                  <a:tcPr anchor="ctr"/>
+                </a:tc>
+                <a:extLst>
+                  <a:ext uri="{0D108BD9-81ED-4DB2-BD59-A6C34878D82A}">
+                    <a16:rowId xmlns:a16="http://schemas.microsoft.com/office/drawing/2014/main" val="3970936403"/>
+                  </a:ext>
+                </a:extLst>
+              </a:tr>
+              <a:tr h="599011">
+                <a:tc>
+                  <a:txBody>
+                    <a:bodyPr/>
+                    <a:lstStyle/>
+                    <a:p>
+                      <a:pPr algn="ctr" latinLnBrk="1"/>
+                      <a:r>
+                        <a:rPr lang="ko-KR" altLang="en-US" sz="1600"/>
+                        <a:t>통계청 KOSIS</a:t>
+                      </a:r>
+                      <a:endParaRPr lang="ko-KR" altLang="en-US" sz="1600" dirty="0"/>
+                    </a:p>
+                  </a:txBody>
+                  <a:tcPr anchor="ctr"/>
+                </a:tc>
+                <a:tc>
+                  <a:txBody>
+                    <a:bodyPr/>
+                    <a:lstStyle/>
+                    <a:p>
+                      <a:pPr latinLnBrk="1"/>
+                      <a:r>
+                        <a:rPr lang="ko-KR" altLang="en-US" sz="1600"/>
+                        <a:t>신생기업 생존율</a:t>
+                      </a:r>
+                      <a:endParaRPr lang="ko-KR" altLang="en-US" sz="1600" dirty="0"/>
+                    </a:p>
+                  </a:txBody>
+                  <a:tcPr anchor="ctr"/>
+                </a:tc>
+                <a:tc>
+                  <a:txBody>
+                    <a:bodyPr/>
+                    <a:lstStyle/>
+                    <a:p>
+                      <a:pPr lvl="0">
+                        <a:buNone/>
+                      </a:pPr>
+                      <a:r>
+                        <a:rPr lang="ko-KR" sz="1600" b="0" i="0" u="none" strike="noStrike" baseline="0" noProof="0">
+                          <a:solidFill>
+                            <a:srgbClr val="000000"/>
+                          </a:solidFill>
+                          <a:latin typeface="맑은 고딕"/>
+                          <a:ea typeface="맑은 고딕"/>
+                        </a:rPr>
+                        <a:t>kosis.kr/openapi/Param/statisticsParameterData.do</a:t>
+                      </a:r>
+                      <a:endParaRPr lang="ko-KR" sz="1600"/>
+                    </a:p>
+                  </a:txBody>
+                  <a:tcPr anchor="ctr"/>
+                </a:tc>
+                <a:tc>
+                  <a:txBody>
+                    <a:bodyPr/>
+                    <a:lstStyle/>
+                    <a:p>
+                      <a:pPr lvl="0">
+                        <a:buNone/>
+                      </a:pPr>
+                      <a:r>
+                        <a:rPr lang="ko-KR" sz="1600" b="0" i="0" u="none" strike="noStrike" baseline="0" noProof="0">
+                          <a:solidFill>
+                            <a:srgbClr val="000000"/>
+                          </a:solidFill>
+                          <a:latin typeface="맑은 고딕"/>
+                          <a:ea typeface="맑은 고딕"/>
+                        </a:rPr>
+                        <a:t>진입 리스크 및 보정점수 반영</a:t>
+                      </a:r>
+                      <a:endParaRPr lang="ko-KR" sz="1600"/>
+                    </a:p>
+                  </a:txBody>
+                  <a:tcPr anchor="ctr"/>
+                </a:tc>
+                <a:extLst>
+                  <a:ext uri="{0D108BD9-81ED-4DB2-BD59-A6C34878D82A}">
+                    <a16:rowId xmlns:a16="http://schemas.microsoft.com/office/drawing/2014/main" val="521409832"/>
+                  </a:ext>
+                </a:extLst>
+              </a:tr>
+              <a:tr h="599011">
+                <a:tc>
+                  <a:txBody>
+                    <a:bodyPr/>
+                    <a:lstStyle/>
+                    <a:p>
+                      <a:pPr algn="ctr" latinLnBrk="1"/>
+                      <a:r>
+                        <a:rPr lang="ko-KR" altLang="en-US" sz="1600"/>
+                        <a:t>소상공인</a:t>
+                      </a:r>
+                      <a:endParaRPr lang="ko-KR" altLang="en-US" sz="1600" dirty="0"/>
+                    </a:p>
+                    <a:p>
+                      <a:pPr lvl="0" algn="ctr">
+                        <a:buNone/>
+                      </a:pPr>
+                      <a:r>
+                        <a:rPr lang="ko-KR" altLang="en-US" sz="1600"/>
+                        <a:t>진흥공단</a:t>
+                      </a:r>
+                    </a:p>
+                  </a:txBody>
+                  <a:tcPr anchor="ctr"/>
+                </a:tc>
+                <a:tc>
+                  <a:txBody>
+                    <a:bodyPr/>
+                    <a:lstStyle/>
+                    <a:p>
+                      <a:pPr lvl="0">
+                        <a:buNone/>
+                      </a:pPr>
+                      <a:r>
+                        <a:rPr lang="ko-KR" sz="1600" b="0" i="0" u="none" strike="noStrike" noProof="0">
+                          <a:solidFill>
+                            <a:srgbClr val="000000"/>
+                          </a:solidFill>
+                          <a:latin typeface="Malgun Gothic"/>
+                          <a:ea typeface="Malgun Gothic"/>
+                        </a:rPr>
+                        <a:t>상가업소 정보 API</a:t>
+                      </a:r>
+                      <a:endParaRPr lang="ko-KR" sz="1600"/>
+                    </a:p>
+                  </a:txBody>
+                  <a:tcPr anchor="ctr"/>
+                </a:tc>
+                <a:tc>
+                  <a:txBody>
+                    <a:bodyPr/>
+                    <a:lstStyle/>
+                    <a:p>
+                      <a:pPr lvl="0">
+                        <a:buNone/>
+                      </a:pPr>
+                      <a:r>
+                        <a:rPr lang="ko-KR" sz="1600" b="0" i="0" u="none" strike="noStrike" baseline="0" noProof="0">
+                          <a:solidFill>
+                            <a:srgbClr val="000000"/>
+                          </a:solidFill>
+                          <a:latin typeface="맑은 고딕"/>
+                          <a:ea typeface="맑은 고딕"/>
+                        </a:rPr>
+                        <a:t>apis.data.go.kr/B553077/api/open/sdsc2</a:t>
+                      </a:r>
+                      <a:endParaRPr lang="ko-KR" sz="1600"/>
+                    </a:p>
+                  </a:txBody>
+                  <a:tcPr anchor="ctr"/>
+                </a:tc>
+                <a:tc>
+                  <a:txBody>
+                    <a:bodyPr/>
+                    <a:lstStyle/>
+                    <a:p>
+                      <a:pPr lvl="0">
+                        <a:buNone/>
+                      </a:pPr>
+                      <a:r>
+                        <a:rPr lang="ko-KR" sz="1600" b="0" i="0" u="none" strike="noStrike" baseline="0" noProof="0">
+                          <a:solidFill>
+                            <a:srgbClr val="000000"/>
+                          </a:solidFill>
+                          <a:latin typeface="맑은 고딕"/>
+                          <a:ea typeface="맑은 고딕"/>
+                        </a:rPr>
+                        <a:t>업종별 점포 수, 경쟁 포화도 산출</a:t>
+                      </a:r>
+                      <a:endParaRPr lang="ko-KR" sz="1600"/>
+                    </a:p>
+                  </a:txBody>
+                  <a:tcPr anchor="ctr"/>
+                </a:tc>
+                <a:extLst>
+                  <a:ext uri="{0D108BD9-81ED-4DB2-BD59-A6C34878D82A}">
+                    <a16:rowId xmlns:a16="http://schemas.microsoft.com/office/drawing/2014/main" val="506221004"/>
+                  </a:ext>
+                </a:extLst>
+              </a:tr>
+            </a:tbl>
+          </a:graphicData>
+        </a:graphic>
+      </p:graphicFrame>
+      <p:sp>
+        <p:nvSpPr>
+          <p:cNvPr id="54" name="TextBox 53">
+            <a:extLst>
+              <a:ext uri="{FF2B5EF4-FFF2-40B4-BE49-F238E27FC236}">
+                <a16:creationId xmlns:a16="http://schemas.microsoft.com/office/drawing/2014/main" id="{383F97E4-7BEF-A813-685D-66ADB8B47920}"/>
+              </a:ext>
+            </a:extLst>
+          </p:cNvPr>
+          <p:cNvSpPr txBox="1"/>
+          <p:nvPr/>
+        </p:nvSpPr>
+        <p:spPr>
+          <a:xfrm>
+            <a:off x="505026" y="682702"/>
+            <a:ext cx="11021121" cy="276999"/>
+          </a:xfrm>
+          <a:prstGeom prst="rect">
+            <a:avLst/>
+          </a:prstGeom>
+          <a:noFill/>
+        </p:spPr>
+        <p:txBody>
+          <a:bodyPr rot="0" spcFirstLastPara="0" vertOverflow="overflow" horzOverflow="overflow" vert="horz" wrap="square" lIns="91440" tIns="45720" rIns="91440" bIns="45720" numCol="1" spcCol="0" rtlCol="0" fromWordArt="0" anchor="t" anchorCtr="0" forceAA="0" compatLnSpc="1">
+            <a:prstTxWarp prst="textNoShape">
+              <a:avLst/>
+            </a:prstTxWarp>
+            <a:spAutoFit/>
+          </a:bodyPr>
+          <a:lstStyle/>
+          <a:p>
+            <a:r>
+              <a:rPr lang="ko-KR" sz="1200">
+                <a:solidFill>
+                  <a:srgbClr val="000000"/>
+                </a:solidFill>
+                <a:latin typeface="맑은 고딕"/>
+                <a:ea typeface="맑은 고딕"/>
+                <a:cs typeface="+mn-lt"/>
+              </a:rPr>
+              <a:t>4개 기관 · 7개 API를 결합해 공공수요·인구·경쟁·생존율을 분석했습니다.</a:t>
+            </a:r>
+            <a:endParaRPr lang="ko-KR" sz="1200">
+              <a:ea typeface="맑은 고딕"/>
+              <a:cs typeface="Calibri"/>
+            </a:endParaRPr>
+          </a:p>
+        </p:txBody>
+      </p:sp>
+      <p:sp>
+        <p:nvSpPr>
+          <p:cNvPr id="56" name="TextBox 55">
+            <a:extLst>
+              <a:ext uri="{FF2B5EF4-FFF2-40B4-BE49-F238E27FC236}">
+                <a16:creationId xmlns:a16="http://schemas.microsoft.com/office/drawing/2014/main" id="{DD970111-8484-F408-6FE9-CB4AA5FD1392}"/>
+              </a:ext>
+            </a:extLst>
+          </p:cNvPr>
+          <p:cNvSpPr txBox="1"/>
+          <p:nvPr/>
+        </p:nvSpPr>
+        <p:spPr>
+          <a:xfrm>
+            <a:off x="1329380" y="6057779"/>
+            <a:ext cx="9530434" cy="660708"/>
+          </a:xfrm>
+          <a:prstGeom prst="rect">
+            <a:avLst/>
+          </a:prstGeom>
+          <a:noFill/>
+        </p:spPr>
+        <p:txBody>
+          <a:bodyPr rot="0" spcFirstLastPara="0" vertOverflow="overflow" horzOverflow="overflow" vert="horz" wrap="square" lIns="91440" tIns="45720" rIns="91440" bIns="45720" numCol="1" spcCol="0" rtlCol="0" fromWordArt="0" anchor="t" anchorCtr="0" forceAA="0" compatLnSpc="1">
+            <a:prstTxWarp prst="textNoShape">
+              <a:avLst/>
+            </a:prstTxWarp>
+            <a:spAutoFit/>
+          </a:bodyPr>
+          <a:lstStyle/>
+          <a:p>
+            <a:r>
+              <a:rPr lang="ko-KR">
+                <a:solidFill>
+                  <a:srgbClr val="000000"/>
+                </a:solidFill>
+                <a:latin typeface="맑은 고딕"/>
+                <a:ea typeface="맑은 고딕"/>
+                <a:cs typeface="+mn-lt"/>
+              </a:rPr>
+              <a:t>※ 주요 출처: 공공데이터포털(data.go.kr) · 조달데이터허브(data.g2b.go.kr) · KOSIS(kosis.kr)</a:t>
+            </a:r>
+            <a:endParaRPr lang="ko-KR" altLang="en-US">
+              <a:solidFill>
+                <a:srgbClr val="000000"/>
+              </a:solidFill>
+              <a:latin typeface="Calibri"/>
+              <a:ea typeface="맑은 고딕" panose="020B0503020000020004" pitchFamily="34" charset="-127"/>
+              <a:cs typeface="+mn-lt"/>
+            </a:endParaRPr>
+          </a:p>
+          <a:p>
+            <a:r>
+              <a:rPr lang="ko-KR">
+                <a:solidFill>
+                  <a:srgbClr val="000000"/>
+                </a:solidFill>
+                <a:latin typeface="맑은 고딕"/>
+                <a:ea typeface="맑은 고딕"/>
+                <a:cs typeface="+mn-lt"/>
+              </a:rPr>
+              <a:t>※ 실제 API 엔드포인트는 수집 코드 기준으로 관리</a:t>
+            </a:r>
+            <a:endParaRPr lang="ko-KR">
+              <a:ea typeface="맑은 고딕"/>
+              <a:cs typeface="Calibri"/>
+            </a:endParaRPr>
+          </a:p>
+        </p:txBody>
+      </p:sp>
+    </p:spTree>
+    <p:extLst>
+      <p:ext uri="{BB962C8B-B14F-4D97-AF65-F5344CB8AC3E}">
+        <p14:creationId xmlns:p14="http://schemas.microsoft.com/office/powerpoint/2010/main" val="794280528"/>
+      </p:ext>
+    </p:extLst>
+  </p:cSld>
+  <p:clrMapOvr>
+    <a:masterClrMapping/>
+  </p:clrMapOvr>
+</p:sld>
+</file>
+
+<file path=ppt/slides/slide12.xml><?xml version="1.0" encoding="utf-8"?>
 <p:sld xmlns:a="http://schemas.openxmlformats.org/drawingml/2006/main" xmlns:r="http://schemas.openxmlformats.org/officeDocument/2006/relationships" xmlns:p="http://schemas.openxmlformats.org/presentationml/2006/main">
   <p:cSld>
     <p:bg>
